--- a/it/slides/13-Architettura_dei_Calcolatori-Macchine_Sequenziali-Codice.pptx
+++ b/it/slides/13-Architettura_dei_Calcolatori-Macchine_Sequenziali-Codice.pptx
@@ -121,28 +121,36 @@
   <p:extLst>
     <p:ext uri="{521415D9-36F7-43E2-AB2F-B90AF26B5E84}">
       <p14:sectionLst xmlns:p14="http://schemas.microsoft.com/office/powerpoint/2010/main">
-        <p14:section name="Apertura" id="{a8b11ff9-e5a7-80fa-14cf-6d4e2fbcdbec}">
+        <p14:section name="Apertura" id="{7483bb68-d71d-944e-b114-bccb714a14ed}">
           <p14:sldIdLst>
             <p14:sldId id="256"/>
             <p14:sldId id="257"/>
           </p14:sldIdLst>
         </p14:section>
-        <p14:section name="I listati" id="{800cb6d6-5586-8a70-f6f1-c6be00bb0974}">
+        <p14:section name="Riscaldamento sulla macchina" id="{a00c4f17-d2b6-6497-5cff-05f364014edc}">
           <p14:sldIdLst>
             <p14:sldId id="258"/>
+          </p14:sldIdLst>
+        </p14:section>
+        <p14:section name="Macchine a stati finiti" id="{107b5681-63ff-89ed-78a1-d4b3238231e1}">
+          <p14:sldIdLst>
             <p14:sldId id="259"/>
+          </p14:sldIdLst>
+        </p14:section>
+        <p14:section name="Ritorno alla macchina" id="{bc627d5c-9b91-ee1e-2848-5f685208f974}">
+          <p14:sldIdLst>
             <p14:sldId id="260"/>
             <p14:sldId id="261"/>
           </p14:sldIdLst>
         </p14:section>
-        <p14:section name="Il programma completo" id="{6aad8cb5-b72d-30f7-fe41-f3b2bfe1b6e4}">
+        <p14:section name="Il programma completo" id="{415057fc-09cb-0ac7-7807-d207b6bdc526}">
           <p14:sldIdLst>
             <p14:sldId id="262"/>
             <p14:sldId id="263"/>
             <p14:sldId id="264"/>
           </p14:sldIdLst>
         </p14:section>
-        <p14:section name="Eseguire e provare" id="{19c78d63-409e-24fa-ef72-4eb857103020}">
+        <p14:section name="Eseguire e provare" id="{26397c58-d2f9-8afc-097a-96d13b0cab3f}">
           <p14:sldIdLst>
             <p14:sldId id="265"/>
             <p14:sldId id="266"/>
@@ -151,7 +159,7 @@
             <p14:sldId id="269"/>
           </p14:sldIdLst>
         </p14:section>
-        <p14:section name="Esercizi" id="{4ae38362-b795-2a4f-5f9c-7dd7cac08495}">
+        <p14:section name="Esercizi" id="{51cb5fab-87bd-593f-2384-57078a14fea7}">
           <p14:sldIdLst>
             <p14:sldId id="270"/>
           </p14:sldIdLst>
@@ -2780,7 +2788,63 @@
       </p:sp>
       <p:sp>
         <p:nvSpPr>
-          <p:cNvPr id="11" name="Shape 9"/>
+          <p:cNvPr id="11" name="Text 9"/>
+          <p:cNvSpPr txBox="1"/>
+          <p:nvPr/>
+        </p:nvSpPr>
+        <p:spPr>
+          <a:xfrm>
+            <a:off x="4693615" y="566928"/>
+            <a:ext cx="6949440" cy="640080"/>
+          </a:xfrm>
+          <a:prstGeom prst="rect">
+            <a:avLst/>
+          </a:prstGeom>
+          <a:noFill/>
+          <a:ln/>
+        </p:spPr>
+        <p:txBody>
+          <a:bodyPr wrap="square" lIns="0" tIns="0" rIns="0" bIns="0" rtlCol="0" anchor="t"/>
+          <a:lstStyle/>
+          <a:p>
+            <a:pPr algn="r" indent="0" marL="0">
+              <a:buNone/>
+            </a:pPr>
+            <a:r>
+              <a:rPr lang="en-US" sz="1300" dirty="0">
+                <a:solidFill>
+                  <a:srgbClr val="CFE3EA"/>
+                </a:solidFill>
+                <a:latin typeface="Calibri" pitchFamily="34" charset="0"/>
+                <a:ea typeface="Calibri" pitchFamily="34" charset="-122"/>
+                <a:cs typeface="Calibri" pitchFamily="34" charset="-120"/>
+              </a:rPr>
+              <a:t>Presentazione del codice. I concetti, le figure e le domande sono nella presentazione della lezione:</a:t>
+            </a:r>
+            <a:endParaRPr lang="en-US" sz="1300" dirty="0"/>
+          </a:p>
+          <a:p>
+            <a:pPr algn="r" indent="0" marL="0">
+              <a:buNone/>
+            </a:pPr>
+            <a:r>
+              <a:rPr lang="en-US" sz="1300" dirty="0">
+                <a:solidFill>
+                  <a:srgbClr val="CFE3EA"/>
+                </a:solidFill>
+                <a:latin typeface="Calibri" pitchFamily="34" charset="0"/>
+                <a:ea typeface="Calibri" pitchFamily="34" charset="-122"/>
+                <a:cs typeface="Calibri" pitchFamily="34" charset="-120"/>
+              </a:rPr>
+              <a:t>13-Architettura_dei_Calcolatori-Macchine_Sequenziali.pptx</a:t>
+            </a:r>
+            <a:endParaRPr lang="en-US" sz="1300" dirty="0"/>
+          </a:p>
+        </p:txBody>
+      </p:sp>
+      <p:sp>
+        <p:nvSpPr>
+          <p:cNvPr id="12" name="Shape 10"/>
           <p:cNvSpPr/>
           <p:nvPr/>
         </p:nvSpPr>
@@ -2807,7 +2871,7 @@
       </p:sp>
       <p:pic>
         <p:nvPicPr>
-          <p:cNvPr id="12" name="Image 0" descr="/Users/raffaelemontella/devel/riscv-prg32/computer-architecture-with-prg32/tools/assets/game_pacman.png">    </p:cNvPr>
+          <p:cNvPr id="13" name="Image 0" descr="/Users/raffaelemontella/devel/riscv-prg32/computer-architecture-with-prg32/tools/assets/game_pacman.png">    </p:cNvPr>
           <p:cNvPicPr>
             <a:picLocks noChangeAspect="1"/>
           </p:cNvPicPr>

--- a/it/slides/13-Architettura_dei_Calcolatori-Macchine_Sequenziali-Codice.pptx
+++ b/it/slides/13-Architettura_dei_Calcolatori-Macchine_Sequenziali-Codice.pptx
@@ -121,36 +121,36 @@
   <p:extLst>
     <p:ext uri="{521415D9-36F7-43E2-AB2F-B90AF26B5E84}">
       <p14:sectionLst xmlns:p14="http://schemas.microsoft.com/office/powerpoint/2010/main">
-        <p14:section name="Apertura" id="{7483bb68-d71d-944e-b114-bccb714a14ed}">
+        <p14:section name="Apertura" id="{725be022-e2de-90b0-745a-98916d1d60f3}">
           <p14:sldIdLst>
             <p14:sldId id="256"/>
             <p14:sldId id="257"/>
           </p14:sldIdLst>
         </p14:section>
-        <p14:section name="Riscaldamento sulla macchina" id="{a00c4f17-d2b6-6497-5cff-05f364014edc}">
+        <p14:section name="Riscaldamento sulla macchina" id="{f230b03e-8623-a333-d697-919fde041449}">
           <p14:sldIdLst>
             <p14:sldId id="258"/>
           </p14:sldIdLst>
         </p14:section>
-        <p14:section name="Macchine a stati finiti" id="{107b5681-63ff-89ed-78a1-d4b3238231e1}">
+        <p14:section name="Macchine a stati finiti" id="{9346c44f-fcf7-46ba-5fc0-d9b9e85fcd35}">
           <p14:sldIdLst>
             <p14:sldId id="259"/>
           </p14:sldIdLst>
         </p14:section>
-        <p14:section name="Ritorno alla macchina" id="{bc627d5c-9b91-ee1e-2848-5f685208f974}">
+        <p14:section name="Ritorno alla macchina" id="{3900a892-dee4-2768-f2cc-caec7e2ce6ce}">
           <p14:sldIdLst>
             <p14:sldId id="260"/>
             <p14:sldId id="261"/>
           </p14:sldIdLst>
         </p14:section>
-        <p14:section name="Il programma completo" id="{415057fc-09cb-0ac7-7807-d207b6bdc526}">
+        <p14:section name="Il programma completo" id="{815a2f3e-3ac2-f11b-5ab9-9f176321da65}">
           <p14:sldIdLst>
             <p14:sldId id="262"/>
             <p14:sldId id="263"/>
             <p14:sldId id="264"/>
           </p14:sldIdLst>
         </p14:section>
-        <p14:section name="Eseguire e provare" id="{26397c58-d2f9-8afc-097a-96d13b0cab3f}">
+        <p14:section name="Eseguire e provare" id="{b9da3072-e2cf-0192-9063-a93869118593}">
           <p14:sldIdLst>
             <p14:sldId id="265"/>
             <p14:sldId id="266"/>
@@ -159,7 +159,7 @@
             <p14:sldId id="269"/>
           </p14:sldIdLst>
         </p14:section>
-        <p14:section name="Esercizi" id="{51cb5fab-87bd-593f-2384-57078a14fea7}">
+        <p14:section name="Esercizi" id="{ba86e318-b263-e280-eda9-d055268241e0}">
           <p14:sldIdLst>
             <p14:sldId id="270"/>
           </p14:sldIdLst>
@@ -568,7 +568,9 @@
           <a:p>
             <a:r>
               <a:rPr lang="en-US" dirty="0"/>
-              <a:t>Questa è la presentazione del codice della Lezione 13. La presentazione della lezione contiene i concetti; questa contiene tutto ciò che si scrive e si esegue: i listati con la loro spiegazione, il programma completo, che cosa mostra, e il modo di provarlo su ciascuno dei tre host.</a:t>
+              <a:t>Questa è la presentazione del codice della Lezione 13. La presentazione della lezione contiene i concetti; questa contiene tutto ciò che si scrive e si esegue: i listati con la loro spiegazione, il programma completo, che cosa mostra, e il modo di provarlo su ciascuno dei tre host.
+Stato di apprendimento: DA COMPRENDERE OGGI, alla fine di questa lezione lo spiegate, lo seguite passo passo e lo applicate da soli; DA UTILIZZARE OGGI, oggi seguite e usate la ricetta; come funziona dentro si spiega più avanti, o non fa parte del corso; DA COMPRENDERE PIÙ AVANTI, riconoscete il nome e lo scopo; lo spiega una lezione successiva. Una slide senza etichetta è contesto: una storia, un esempio, una domanda, un esercizio.
+Stato di apprendimento di questa lezione. DA COMPRENDERE OGGI: macchine a stati finiti; il clock; latch e flip-flop; i registri come flip-flop. DA UTILIZZARE OGGI: il programma completo, gli strumenti di PRG32 (si usa, non si studia, in questo corso). DA COMPRENDERE PIÙ AVANTI: niente. Una slide senza etichetta è contesto: una storia, un esempio, una domanda, un esercizio.</a:t>
             </a:r>
             <a:endParaRPr lang="en-US" dirty="0"/>
           </a:p>
@@ -746,6 +748,7 @@
             <a:r>
               <a:rPr lang="en-US" dirty="0"/>
               <a:t>La via più rapida: PRG32-QT sul vostro computer. Quattro passi, ciascuno con il suo comando. PRG32-QT si comporta come una scheda sulla porta 8080, ed è per questo che il comando di caricamento dice esp32c6. Con la modalità debug abilitata potete fermarvi su qualsiasi istruzione e leggere registri e memoria.
+DA UTILIZZARE OGGI: gli strumenti di PRG32 (si usa, non si studia, in questo corso).
 Per il docente: Eseguito dai test: la cartuccia di questa slide è compilata con questo comando ed eseguita sull'esecutore senza interfaccia di PRG32-QT. Senza la toolchain: importate il file .prg32 in PRG32-QT e scegliete Run Cartridge. Tasti: frecce o WASD per il joystick, Z o J per A, X o K per B, Invio per Start, Esc per tornare a Setup.</a:t>
             </a:r>
             <a:endParaRPr lang="en-US" dirty="0"/>
@@ -835,6 +838,7 @@
             <a:r>
               <a:rPr lang="en-US" dirty="0"/>
               <a:t>Lo stesso programma sull'emulatore. QEMU esegue il firmware vero su un chip emulato, quindi la cartuccia va compilata per l'architettura qemu. Caricate la cartuccia mentre QEMU è chiuso. Il firmware si apre sul menu Setup: scegliete Run Cartridge e lo slot. Ricordate che la tastiera è letta dal terminale, non dalla finestra con l'immagine.
+DA UTILIZZARE OGGI: gli strumenti di PRG32 (si usa, non si studia, in questo corso).
 Per il docente: Verificato dai test fino al caricamento: la cartuccia è compilata per l'architettura qemu e accettata nell'immagine flash dell'emulatore. Ciò che l'emulatore poi mostra non è verificato automaticamente: il QEMU di Espressif ha bisogno della sua finestra. Dall'ottobre 2026 il firmware parte da Setup: scegliete Run Cartridge, poi cart0.</a:t>
             </a:r>
             <a:endParaRPr lang="en-US" dirty="0"/>
@@ -924,6 +928,7 @@
             <a:r>
               <a:rPr lang="en-US" dirty="0"/>
               <a:t>Lo stesso programma sul kit. Il firmware si scrive una volta, via USB; dopo, le cartucce viaggiano sul Wi-Fi. Il comando di caricamento è quello usato per PRG32-QT con l'indirizzo della scheda. È l'unico host che i test automatici non eseguono: provatelo, e riferite ciò che vedete.
+DA UTILIZZARE OGGI: gli strumenti di PRG32 (si usa, non si studia, in questo corso).
 Per il docente: Non eseguito dai test: sulla macchina di prova non c'è una scheda. La cartuccia per l'architettura esp32c6 è compilata dai test; i passi sono quelli della documentazione di PRG32. Se la porta seriale non viene trovata, passatela esplicitamente. Per usare il Wi-Fi dell'aula: python3 -m prg32 wifi set --ssid NOME --password PASSWORD --mode sta.</a:t>
             </a:r>
             <a:endParaRPr lang="en-US" dirty="0"/>
@@ -1013,6 +1018,7 @@
             <a:r>
               <a:rPr lang="en-US" dirty="0"/>
               <a:t>I cinque sintomi più comuni, che cosa significa ciascuno, e che cosa fare. Leggete il messaggio prima di cambiare qualcosa: quasi sempre nomina la causa.
+DA UTILIZZARE OGGI: gli strumenti di PRG32 (si usa, non si studia, in questo corso).
 Per il docente: Le prime tre righe coprono la maggior parte dei casi. Quando chiedete aiuto, incollate il comando e l'intero messaggio come testo. docs/usage/troubleshooting.md del repository di PRG32 ha l'elenco completo.</a:t>
             </a:r>
             <a:endParaRPr lang="en-US" dirty="0"/>
@@ -1280,6 +1286,7 @@
             <a:r>
               <a:rPr lang="en-US" dirty="0"/>
               <a:t>Un gioco con una schermata del titolo, un campo di gioco e una schermata di fine partita. La variabile state contiene uno di tre valori. game_update legge il pulsante A e lo stato presente: in TITLE, premere A porta a PLAY; in OVER, premere A riporta a TITLE; altrimenti non cambia nulla. Quindi l'effetto di A dipende dallo stato. È una macchina a stati: update calcola lo stato prossimo dallo stato presente e dall'ingresso, lo stato sopravvive in memoria da un frame all'altro, e draw mostra una schermata per ogni stato.
+DA COMPRENDERE OGGI: macchine a stati finiti.
 Per il docente: Scritto per questa lezione; il gioco finale del libro di PRG32 ha la stessa struttura. Bug da discutere: tenendo premuto A nella schermata OVER si va a TITLE e, un frame dopo, a PLAY. Per correggerlo bisogna ricordare il valore precedente del pulsante: un bit di stato in più.</a:t>
             </a:r>
             <a:endParaRPr lang="en-US" dirty="0"/>
@@ -1369,6 +1376,7 @@
             <a:r>
               <a:rPr lang="en-US" dirty="0"/>
               <a:t>Il gioco del riscaldamento disegnato come diagramma: tre stati, con A che porta da TITLE a PLAY e da OVER a TITLE, e la fine delle vite che porta da PLAY a OVER. Gli anelli su ogni stato sono i casi in cui non cambia nulla. La tabella sotto elenca, per ogni stato, l'ingresso che lo cambia, lo stato prossimo e l'uscita disegnata. Disegnate il diagramma prima di scrivere il codice: per un gioco è l'abitudine di progetto più utile che ci sia.
+DA COMPRENDERE OGGI: macchine a stati finiti.
 Per il docente: Una macchina di Moore con tre stati: basterebbero due bit di stato, il programma usa una parola intera. Disegnare il diagramma prima di scrivere il codice è l'abitudine di progetto più utile per un gioco.</a:t>
             </a:r>
             <a:endParaRPr lang="en-US" dirty="0"/>
@@ -1458,6 +1466,7 @@
             <a:r>
               <a:rPr lang="en-US" dirty="0"/>
               <a:t>Il program counter, PC, è il registro che contiene l'indirizzo dell'istruzione in esecuzione. Il suo valore prossimo è calcolato da una piccola rete: un sommatore dà PC più 4, l'indirizzo dell'istruzione seguente, e un multiplexer sceglie tra quello e la destinazione di un salto. A ogni fronte di clock il valore prossimo diventa quello presente. Ha esattamente la forma dell'architettura generale. Con il solo percorso più 4 è un contatore, la più semplice delle macchine a stati.
+DA COMPRENDERE OGGI: i registri come flip-flop.
 Per il docente: Il comparatore della Lezione 11 produce «salto eseguito?» per beq e bne. Le istruzioni distano 4 byte; con l'estensione compressa il sommatore aggiunge 2 per le istruzioni a 16 bit.</a:t>
             </a:r>
             <a:endParaRPr lang="en-US" dirty="0"/>
@@ -1547,6 +1556,7 @@
             <a:r>
               <a:rPr lang="en-US" dirty="0"/>
               <a:t>L'intero processore è una macchina sequenziale. Il suo stato è il program counter, i trentadue registri e la memoria. Il suo ingresso è l'istruzione che si trova all'indirizzo contenuto nel PC, con i dati che legge. La rete dello stato prossimo è fatta di decodificatori, multiplexer e della ALU. Al fronte del clock i registri indicati dall'istruzione prendono i nuovi valori. Eseguire un programma è una passeggiata tra gli stati di una macchina a stati molto grande, e l'esecuzione passo-passo in PRG32-QT mostra quella passeggiata uno stato alla volta.
+DA COMPRENDERE OGGI: macchine a stati finiti.
 Per il docente: È il ponte verso le lezioni sul processore: datapath (la parte combinatoria e i registri) e controllo (a sua volta una macchina a stati finiti nei progetti multiciclo e microprogrammati).</a:t>
             </a:r>
             <a:endParaRPr lang="en-US" dirty="0"/>
@@ -1636,6 +1646,7 @@
             <a:r>
               <a:rPr lang="en-US" dirty="0"/>
               <a:t>Una pagina del programma completo, esattamente com'è nel repository. Leggetelo dall'inizio: l'intestazione dice che cosa mostra il programma e come compilarlo; seguono le tre funzioni init, update e draw, poi i dati. Le righe incontrate nei listati della lezione hanno qui gli stessi commenti.
+DA UTILIZZARE OGGI: il programma completo (si usa, non si studia, in questo corso).
 Per il docente: code/l13.S, come viene compilato ed eseguito dai test. I commenti fanno parte del programma, e sono in inglese come in tutti i listati: leggeteli con il codice.</a:t>
             </a:r>
             <a:endParaRPr lang="en-US" dirty="0"/>
@@ -1725,6 +1736,7 @@
             <a:r>
               <a:rPr lang="en-US" dirty="0"/>
               <a:t>Una pagina del programma completo, esattamente com'è nel repository. Leggetelo dall'inizio: l'intestazione dice che cosa mostra il programma e come compilarlo; seguono le tre funzioni init, update e draw, poi i dati. Le righe incontrate nei listati della lezione hanno qui gli stessi commenti.
+DA UTILIZZARE OGGI: il programma completo (si usa, non si studia, in questo corso).
 Per il docente: code/l13.S, come viene compilato ed eseguito dai test. I commenti fanno parte del programma, e sono in inglese come in tutti i listati: leggeteli con il codice.</a:t>
             </a:r>
             <a:endParaRPr lang="en-US" dirty="0"/>
@@ -1814,6 +1826,7 @@
             <a:r>
               <a:rPr lang="en-US" dirty="0"/>
               <a:t>Una pagina del programma completo, esattamente com'è nel repository. Leggetelo dall'inizio: l'intestazione dice che cosa mostra il programma e come compilarlo; seguono le tre funzioni init, update e draw, poi i dati. Le righe incontrate nei listati della lezione hanno qui gli stessi commenti.
+DA UTILIZZARE OGGI: il programma completo (si usa, non si studia, in questo corso).
 Per il docente: code/l13.S, come viene compilato ed eseguito dai test. I commenti fanno parte del programma, e sono in inglese come in tutti i listati: leggeteli con il codice.</a:t>
             </a:r>
             <a:endParaRPr lang="en-US" dirty="0"/>
@@ -2895,6 +2908,420 @@
       </p:pic>
       <p:sp>
         <p:nvSpPr>
+          <p:cNvPr id="14" name="Shape 11"/>
+          <p:cNvSpPr/>
+          <p:nvPr/>
+        </p:nvSpPr>
+        <p:spPr>
+          <a:xfrm>
+            <a:off x="8910777" y="91440"/>
+            <a:ext cx="2732278" cy="274320"/>
+          </a:xfrm>
+          <a:prstGeom prst="rect">
+            <a:avLst/>
+          </a:prstGeom>
+          <a:solidFill>
+            <a:srgbClr val="F3E8FF"/>
+          </a:solidFill>
+          <a:ln w="12700">
+            <a:solidFill>
+              <a:srgbClr val="7E22CE"/>
+            </a:solidFill>
+            <a:prstDash val="dash"/>
+          </a:ln>
+        </p:spPr>
+      </p:sp>
+      <p:sp>
+        <p:nvSpPr>
+          <p:cNvPr id="15" name="Shape 12"/>
+          <p:cNvSpPr/>
+          <p:nvPr/>
+        </p:nvSpPr>
+        <p:spPr>
+          <a:xfrm>
+            <a:off x="8938209" y="128016"/>
+            <a:ext cx="45720" cy="45720"/>
+          </a:xfrm>
+          <a:prstGeom prst="rect">
+            <a:avLst/>
+          </a:prstGeom>
+          <a:solidFill>
+            <a:srgbClr val="7E22CE"/>
+          </a:solidFill>
+          <a:ln w="12700">
+            <a:solidFill>
+              <a:srgbClr val="7E22CE"/>
+            </a:solidFill>
+            <a:prstDash val="solid"/>
+          </a:ln>
+        </p:spPr>
+      </p:sp>
+      <p:sp>
+        <p:nvSpPr>
+          <p:cNvPr id="16" name="Shape 13"/>
+          <p:cNvSpPr/>
+          <p:nvPr/>
+        </p:nvSpPr>
+        <p:spPr>
+          <a:xfrm>
+            <a:off x="8938209" y="205740"/>
+            <a:ext cx="45720" cy="45720"/>
+          </a:xfrm>
+          <a:prstGeom prst="rect">
+            <a:avLst/>
+          </a:prstGeom>
+          <a:solidFill>
+            <a:srgbClr val="7E22CE"/>
+          </a:solidFill>
+          <a:ln w="12700">
+            <a:solidFill>
+              <a:srgbClr val="7E22CE"/>
+            </a:solidFill>
+            <a:prstDash val="solid"/>
+          </a:ln>
+        </p:spPr>
+      </p:sp>
+      <p:sp>
+        <p:nvSpPr>
+          <p:cNvPr id="17" name="Shape 14"/>
+          <p:cNvSpPr/>
+          <p:nvPr/>
+        </p:nvSpPr>
+        <p:spPr>
+          <a:xfrm>
+            <a:off x="8938209" y="283464"/>
+            <a:ext cx="45720" cy="45720"/>
+          </a:xfrm>
+          <a:prstGeom prst="rect">
+            <a:avLst/>
+          </a:prstGeom>
+          <a:solidFill>
+            <a:srgbClr val="7E22CE"/>
+          </a:solidFill>
+          <a:ln w="12700">
+            <a:solidFill>
+              <a:srgbClr val="7E22CE"/>
+            </a:solidFill>
+            <a:prstDash val="solid"/>
+          </a:ln>
+        </p:spPr>
+      </p:sp>
+      <p:pic>
+        <p:nvPicPr>
+          <p:cNvPr id="18" name="Image 1" descr="preencoded.png">    </p:cNvPr>
+          <p:cNvPicPr>
+            <a:picLocks noChangeAspect="1"/>
+          </p:cNvPicPr>
+          <p:nvPr/>
+        </p:nvPicPr>
+        <p:blipFill>
+          <a:blip r:embed="rId2"/>
+          <a:stretch>
+            <a:fillRect/>
+          </a:stretch>
+        </p:blipFill>
+        <p:spPr>
+          <a:xfrm>
+            <a:off x="9038793" y="128016"/>
+            <a:ext cx="201168" cy="201168"/>
+          </a:xfrm>
+          <a:prstGeom prst="rect">
+            <a:avLst/>
+          </a:prstGeom>
+        </p:spPr>
+      </p:pic>
+      <p:sp>
+        <p:nvSpPr>
+          <p:cNvPr id="19" name="Text 15"/>
+          <p:cNvSpPr txBox="1"/>
+          <p:nvPr/>
+        </p:nvSpPr>
+        <p:spPr>
+          <a:xfrm>
+            <a:off x="9294825" y="91440"/>
+            <a:ext cx="2311654" cy="274320"/>
+          </a:xfrm>
+          <a:prstGeom prst="rect">
+            <a:avLst/>
+          </a:prstGeom>
+          <a:noFill/>
+          <a:ln/>
+        </p:spPr>
+        <p:txBody>
+          <a:bodyPr wrap="square" lIns="0" tIns="0" rIns="0" bIns="0" rtlCol="0" anchor="ctr"/>
+          <a:lstStyle/>
+          <a:p>
+            <a:pPr indent="0" marL="0">
+              <a:buNone/>
+            </a:pPr>
+            <a:r>
+              <a:rPr lang="en-US" sz="1100" b="1" dirty="0">
+                <a:solidFill>
+                  <a:srgbClr val="6B21A8"/>
+                </a:solidFill>
+                <a:latin typeface="Calibri" pitchFamily="34" charset="0"/>
+                <a:ea typeface="Calibri" pitchFamily="34" charset="-122"/>
+                <a:cs typeface="Calibri" pitchFamily="34" charset="-120"/>
+              </a:rPr>
+              <a:t>DA COMPRENDERE PIÙ AVANTI</a:t>
+            </a:r>
+            <a:endParaRPr lang="en-US" sz="1100" dirty="0"/>
+          </a:p>
+        </p:txBody>
+      </p:sp>
+      <p:sp>
+        <p:nvSpPr>
+          <p:cNvPr id="20" name="Shape 16"/>
+          <p:cNvSpPr/>
+          <p:nvPr/>
+        </p:nvSpPr>
+        <p:spPr>
+          <a:xfrm>
+            <a:off x="6675069" y="91440"/>
+            <a:ext cx="2125980" cy="274320"/>
+          </a:xfrm>
+          <a:prstGeom prst="rect">
+            <a:avLst/>
+          </a:prstGeom>
+          <a:solidFill>
+            <a:srgbClr val="FEF3C7"/>
+          </a:solidFill>
+          <a:ln w="12700">
+            <a:solidFill>
+              <a:srgbClr val="B45309"/>
+            </a:solidFill>
+            <a:prstDash val="solid"/>
+          </a:ln>
+        </p:spPr>
+      </p:sp>
+      <p:sp>
+        <p:nvSpPr>
+          <p:cNvPr id="21" name="Shape 17"/>
+          <p:cNvSpPr/>
+          <p:nvPr/>
+        </p:nvSpPr>
+        <p:spPr>
+          <a:xfrm>
+            <a:off x="6675069" y="91440"/>
+            <a:ext cx="27432" cy="274320"/>
+          </a:xfrm>
+          <a:prstGeom prst="rect">
+            <a:avLst/>
+          </a:prstGeom>
+          <a:solidFill>
+            <a:srgbClr val="B45309"/>
+          </a:solidFill>
+          <a:ln w="12700">
+            <a:solidFill>
+              <a:srgbClr val="B45309"/>
+            </a:solidFill>
+            <a:prstDash val="solid"/>
+          </a:ln>
+        </p:spPr>
+      </p:sp>
+      <p:sp>
+        <p:nvSpPr>
+          <p:cNvPr id="22" name="Shape 18"/>
+          <p:cNvSpPr/>
+          <p:nvPr/>
+        </p:nvSpPr>
+        <p:spPr>
+          <a:xfrm>
+            <a:off x="6729933" y="91440"/>
+            <a:ext cx="27432" cy="274320"/>
+          </a:xfrm>
+          <a:prstGeom prst="rect">
+            <a:avLst/>
+          </a:prstGeom>
+          <a:solidFill>
+            <a:srgbClr val="B45309"/>
+          </a:solidFill>
+          <a:ln w="12700">
+            <a:solidFill>
+              <a:srgbClr val="B45309"/>
+            </a:solidFill>
+            <a:prstDash val="solid"/>
+          </a:ln>
+        </p:spPr>
+      </p:sp>
+      <p:pic>
+        <p:nvPicPr>
+          <p:cNvPr id="23" name="Image 2" descr="preencoded.png">    </p:cNvPr>
+          <p:cNvPicPr>
+            <a:picLocks noChangeAspect="1"/>
+          </p:cNvPicPr>
+          <p:nvPr/>
+        </p:nvPicPr>
+        <p:blipFill>
+          <a:blip r:embed="rId3"/>
+          <a:stretch>
+            <a:fillRect/>
+          </a:stretch>
+        </p:blipFill>
+        <p:spPr>
+          <a:xfrm>
+            <a:off x="6803085" y="128016"/>
+            <a:ext cx="201168" cy="201168"/>
+          </a:xfrm>
+          <a:prstGeom prst="rect">
+            <a:avLst/>
+          </a:prstGeom>
+        </p:spPr>
+      </p:pic>
+      <p:sp>
+        <p:nvSpPr>
+          <p:cNvPr id="24" name="Text 19"/>
+          <p:cNvSpPr txBox="1"/>
+          <p:nvPr/>
+        </p:nvSpPr>
+        <p:spPr>
+          <a:xfrm>
+            <a:off x="7059117" y="91440"/>
+            <a:ext cx="1705356" cy="274320"/>
+          </a:xfrm>
+          <a:prstGeom prst="rect">
+            <a:avLst/>
+          </a:prstGeom>
+          <a:noFill/>
+          <a:ln/>
+        </p:spPr>
+        <p:txBody>
+          <a:bodyPr wrap="square" lIns="0" tIns="0" rIns="0" bIns="0" rtlCol="0" anchor="ctr"/>
+          <a:lstStyle/>
+          <a:p>
+            <a:pPr indent="0" marL="0">
+              <a:buNone/>
+            </a:pPr>
+            <a:r>
+              <a:rPr lang="en-US" sz="1100" b="1" dirty="0">
+                <a:solidFill>
+                  <a:srgbClr val="92400E"/>
+                </a:solidFill>
+                <a:latin typeface="Calibri" pitchFamily="34" charset="0"/>
+                <a:ea typeface="Calibri" pitchFamily="34" charset="-122"/>
+                <a:cs typeface="Calibri" pitchFamily="34" charset="-120"/>
+              </a:rPr>
+              <a:t>DA UTILIZZARE OGGI</a:t>
+            </a:r>
+            <a:endParaRPr lang="en-US" sz="1100" dirty="0"/>
+          </a:p>
+        </p:txBody>
+      </p:sp>
+      <p:sp>
+        <p:nvSpPr>
+          <p:cNvPr id="25" name="Shape 20"/>
+          <p:cNvSpPr/>
+          <p:nvPr/>
+        </p:nvSpPr>
+        <p:spPr>
+          <a:xfrm>
+            <a:off x="4352747" y="91440"/>
+            <a:ext cx="2212594" cy="274320"/>
+          </a:xfrm>
+          <a:prstGeom prst="rect">
+            <a:avLst/>
+          </a:prstGeom>
+          <a:solidFill>
+            <a:srgbClr val="E0F2FE"/>
+          </a:solidFill>
+          <a:ln w="12700">
+            <a:solidFill>
+              <a:srgbClr val="0369A1"/>
+            </a:solidFill>
+            <a:prstDash val="solid"/>
+          </a:ln>
+        </p:spPr>
+      </p:sp>
+      <p:sp>
+        <p:nvSpPr>
+          <p:cNvPr id="26" name="Shape 21"/>
+          <p:cNvSpPr/>
+          <p:nvPr/>
+        </p:nvSpPr>
+        <p:spPr>
+          <a:xfrm>
+            <a:off x="4352747" y="91440"/>
+            <a:ext cx="73152" cy="274320"/>
+          </a:xfrm>
+          <a:prstGeom prst="rect">
+            <a:avLst/>
+          </a:prstGeom>
+          <a:solidFill>
+            <a:srgbClr val="0369A1"/>
+          </a:solidFill>
+          <a:ln w="12700">
+            <a:solidFill>
+              <a:srgbClr val="0369A1"/>
+            </a:solidFill>
+            <a:prstDash val="solid"/>
+          </a:ln>
+        </p:spPr>
+      </p:sp>
+      <p:pic>
+        <p:nvPicPr>
+          <p:cNvPr id="27" name="Image 3" descr="preencoded.png">    </p:cNvPr>
+          <p:cNvPicPr>
+            <a:picLocks noChangeAspect="1"/>
+          </p:cNvPicPr>
+          <p:nvPr/>
+        </p:nvPicPr>
+        <p:blipFill>
+          <a:blip r:embed="rId4"/>
+          <a:stretch>
+            <a:fillRect/>
+          </a:stretch>
+        </p:blipFill>
+        <p:spPr>
+          <a:xfrm>
+            <a:off x="4480763" y="128016"/>
+            <a:ext cx="201168" cy="201168"/>
+          </a:xfrm>
+          <a:prstGeom prst="rect">
+            <a:avLst/>
+          </a:prstGeom>
+        </p:spPr>
+      </p:pic>
+      <p:sp>
+        <p:nvSpPr>
+          <p:cNvPr id="28" name="Text 22"/>
+          <p:cNvSpPr txBox="1"/>
+          <p:nvPr/>
+        </p:nvSpPr>
+        <p:spPr>
+          <a:xfrm>
+            <a:off x="4736795" y="91440"/>
+            <a:ext cx="1791970" cy="274320"/>
+          </a:xfrm>
+          <a:prstGeom prst="rect">
+            <a:avLst/>
+          </a:prstGeom>
+          <a:noFill/>
+          <a:ln/>
+        </p:spPr>
+        <p:txBody>
+          <a:bodyPr wrap="square" lIns="0" tIns="0" rIns="0" bIns="0" rtlCol="0" anchor="ctr"/>
+          <a:lstStyle/>
+          <a:p>
+            <a:pPr indent="0" marL="0">
+              <a:buNone/>
+            </a:pPr>
+            <a:r>
+              <a:rPr lang="en-US" sz="1100" b="1" dirty="0">
+                <a:solidFill>
+                  <a:srgbClr val="075985"/>
+                </a:solidFill>
+                <a:latin typeface="Calibri" pitchFamily="34" charset="0"/>
+                <a:ea typeface="Calibri" pitchFamily="34" charset="-122"/>
+                <a:cs typeface="Calibri" pitchFamily="34" charset="-120"/>
+              </a:rPr>
+              <a:t>DA COMPRENDERE OGGI</a:t>
+            </a:r>
+            <a:endParaRPr lang="en-US" sz="1100" dirty="0"/>
+          </a:p>
+        </p:txBody>
+      </p:sp>
+      <p:sp>
+        <p:nvSpPr>
           <p:cNvPr id="25" name="Slide Number Placeholder 0"/>
           <p:cNvSpPr>
             <a:spLocks noGrp="1"/>
@@ -4048,6 +4475,158 @@
       </p:sp>
       <p:sp>
         <p:nvSpPr>
+          <p:cNvPr id="17" name="Shape 15"/>
+          <p:cNvSpPr/>
+          <p:nvPr/>
+        </p:nvSpPr>
+        <p:spPr>
+          <a:xfrm>
+            <a:off x="7875600" y="91440"/>
+            <a:ext cx="3767455" cy="274320"/>
+          </a:xfrm>
+          <a:prstGeom prst="rect">
+            <a:avLst/>
+          </a:prstGeom>
+          <a:solidFill>
+            <a:srgbClr val="FEF3C7"/>
+          </a:solidFill>
+          <a:ln w="12700">
+            <a:solidFill>
+              <a:srgbClr val="B45309"/>
+            </a:solidFill>
+            <a:prstDash val="solid"/>
+          </a:ln>
+        </p:spPr>
+      </p:sp>
+      <p:sp>
+        <p:nvSpPr>
+          <p:cNvPr id="18" name="Shape 16"/>
+          <p:cNvSpPr/>
+          <p:nvPr/>
+        </p:nvSpPr>
+        <p:spPr>
+          <a:xfrm>
+            <a:off x="7875600" y="91440"/>
+            <a:ext cx="27432" cy="274320"/>
+          </a:xfrm>
+          <a:prstGeom prst="rect">
+            <a:avLst/>
+          </a:prstGeom>
+          <a:solidFill>
+            <a:srgbClr val="B45309"/>
+          </a:solidFill>
+          <a:ln w="12700">
+            <a:solidFill>
+              <a:srgbClr val="B45309"/>
+            </a:solidFill>
+            <a:prstDash val="solid"/>
+          </a:ln>
+        </p:spPr>
+      </p:sp>
+      <p:sp>
+        <p:nvSpPr>
+          <p:cNvPr id="19" name="Shape 17"/>
+          <p:cNvSpPr/>
+          <p:nvPr/>
+        </p:nvSpPr>
+        <p:spPr>
+          <a:xfrm>
+            <a:off x="7930464" y="91440"/>
+            <a:ext cx="27432" cy="274320"/>
+          </a:xfrm>
+          <a:prstGeom prst="rect">
+            <a:avLst/>
+          </a:prstGeom>
+          <a:solidFill>
+            <a:srgbClr val="B45309"/>
+          </a:solidFill>
+          <a:ln w="12700">
+            <a:solidFill>
+              <a:srgbClr val="B45309"/>
+            </a:solidFill>
+            <a:prstDash val="solid"/>
+          </a:ln>
+        </p:spPr>
+      </p:sp>
+      <p:pic>
+        <p:nvPicPr>
+          <p:cNvPr id="20" name="Image 0" descr="preencoded.png">    </p:cNvPr>
+          <p:cNvPicPr>
+            <a:picLocks noChangeAspect="1"/>
+          </p:cNvPicPr>
+          <p:nvPr/>
+        </p:nvPicPr>
+        <p:blipFill>
+          <a:blip r:embed="rId1"/>
+          <a:stretch>
+            <a:fillRect/>
+          </a:stretch>
+        </p:blipFill>
+        <p:spPr>
+          <a:xfrm>
+            <a:off x="8003616" y="128016"/>
+            <a:ext cx="201168" cy="201168"/>
+          </a:xfrm>
+          <a:prstGeom prst="rect">
+            <a:avLst/>
+          </a:prstGeom>
+        </p:spPr>
+      </p:pic>
+      <p:sp>
+        <p:nvSpPr>
+          <p:cNvPr id="21" name="Text 18"/>
+          <p:cNvSpPr txBox="1"/>
+          <p:nvPr/>
+        </p:nvSpPr>
+        <p:spPr>
+          <a:xfrm>
+            <a:off x="8259648" y="91440"/>
+            <a:ext cx="3346831" cy="274320"/>
+          </a:xfrm>
+          <a:prstGeom prst="rect">
+            <a:avLst/>
+          </a:prstGeom>
+          <a:noFill/>
+          <a:ln/>
+        </p:spPr>
+        <p:txBody>
+          <a:bodyPr wrap="square" lIns="0" tIns="0" rIns="0" bIns="0" rtlCol="0" anchor="ctr"/>
+          <a:lstStyle/>
+          <a:p>
+            <a:pPr indent="0" marL="0">
+              <a:buNone/>
+            </a:pPr>
+            <a:r>
+              <a:rPr lang="en-US" sz="1100" b="1" dirty="0">
+                <a:solidFill>
+                  <a:srgbClr val="92400E"/>
+                </a:solidFill>
+                <a:latin typeface="Calibri" pitchFamily="34" charset="0"/>
+                <a:ea typeface="Calibri" pitchFamily="34" charset="-122"/>
+                <a:cs typeface="Calibri" pitchFamily="34" charset="-120"/>
+              </a:rPr>
+              <a:t>DA UTILIZZARE OGGI</a:t>
+            </a:r>
+            <a:pPr indent="0" marL="0">
+              <a:buNone/>
+            </a:pPr>
+            <a:r>
+              <a:rPr lang="en-US" sz="1100" dirty="0">
+                <a:solidFill>
+                  <a:srgbClr val="92400E"/>
+                </a:solidFill>
+                <a:latin typeface="Calibri" pitchFamily="34" charset="0"/>
+                <a:ea typeface="Calibri" pitchFamily="34" charset="-122"/>
+                <a:cs typeface="Calibri" pitchFamily="34" charset="-120"/>
+              </a:rPr>
+              <a:t> · gli strumenti di PRG32</a:t>
+            </a:r>
+            <a:endParaRPr lang="en-US" sz="1100" dirty="0"/>
+          </a:p>
+        </p:txBody>
+      </p:sp>
+      <p:sp>
+        <p:nvSpPr>
           <p:cNvPr id="25" name="Slide Number Placeholder 0"/>
           <p:cNvSpPr>
             <a:spLocks noGrp="1"/>
@@ -4884,6 +5463,158 @@
       </p:sp>
       <p:sp>
         <p:nvSpPr>
+          <p:cNvPr id="17" name="Shape 15"/>
+          <p:cNvSpPr/>
+          <p:nvPr/>
+        </p:nvSpPr>
+        <p:spPr>
+          <a:xfrm>
+            <a:off x="7875600" y="91440"/>
+            <a:ext cx="3767455" cy="274320"/>
+          </a:xfrm>
+          <a:prstGeom prst="rect">
+            <a:avLst/>
+          </a:prstGeom>
+          <a:solidFill>
+            <a:srgbClr val="FEF3C7"/>
+          </a:solidFill>
+          <a:ln w="12700">
+            <a:solidFill>
+              <a:srgbClr val="B45309"/>
+            </a:solidFill>
+            <a:prstDash val="solid"/>
+          </a:ln>
+        </p:spPr>
+      </p:sp>
+      <p:sp>
+        <p:nvSpPr>
+          <p:cNvPr id="18" name="Shape 16"/>
+          <p:cNvSpPr/>
+          <p:nvPr/>
+        </p:nvSpPr>
+        <p:spPr>
+          <a:xfrm>
+            <a:off x="7875600" y="91440"/>
+            <a:ext cx="27432" cy="274320"/>
+          </a:xfrm>
+          <a:prstGeom prst="rect">
+            <a:avLst/>
+          </a:prstGeom>
+          <a:solidFill>
+            <a:srgbClr val="B45309"/>
+          </a:solidFill>
+          <a:ln w="12700">
+            <a:solidFill>
+              <a:srgbClr val="B45309"/>
+            </a:solidFill>
+            <a:prstDash val="solid"/>
+          </a:ln>
+        </p:spPr>
+      </p:sp>
+      <p:sp>
+        <p:nvSpPr>
+          <p:cNvPr id="19" name="Shape 17"/>
+          <p:cNvSpPr/>
+          <p:nvPr/>
+        </p:nvSpPr>
+        <p:spPr>
+          <a:xfrm>
+            <a:off x="7930464" y="91440"/>
+            <a:ext cx="27432" cy="274320"/>
+          </a:xfrm>
+          <a:prstGeom prst="rect">
+            <a:avLst/>
+          </a:prstGeom>
+          <a:solidFill>
+            <a:srgbClr val="B45309"/>
+          </a:solidFill>
+          <a:ln w="12700">
+            <a:solidFill>
+              <a:srgbClr val="B45309"/>
+            </a:solidFill>
+            <a:prstDash val="solid"/>
+          </a:ln>
+        </p:spPr>
+      </p:sp>
+      <p:pic>
+        <p:nvPicPr>
+          <p:cNvPr id="20" name="Image 0" descr="preencoded.png">    </p:cNvPr>
+          <p:cNvPicPr>
+            <a:picLocks noChangeAspect="1"/>
+          </p:cNvPicPr>
+          <p:nvPr/>
+        </p:nvPicPr>
+        <p:blipFill>
+          <a:blip r:embed="rId1"/>
+          <a:stretch>
+            <a:fillRect/>
+          </a:stretch>
+        </p:blipFill>
+        <p:spPr>
+          <a:xfrm>
+            <a:off x="8003616" y="128016"/>
+            <a:ext cx="201168" cy="201168"/>
+          </a:xfrm>
+          <a:prstGeom prst="rect">
+            <a:avLst/>
+          </a:prstGeom>
+        </p:spPr>
+      </p:pic>
+      <p:sp>
+        <p:nvSpPr>
+          <p:cNvPr id="21" name="Text 18"/>
+          <p:cNvSpPr txBox="1"/>
+          <p:nvPr/>
+        </p:nvSpPr>
+        <p:spPr>
+          <a:xfrm>
+            <a:off x="8259648" y="91440"/>
+            <a:ext cx="3346831" cy="274320"/>
+          </a:xfrm>
+          <a:prstGeom prst="rect">
+            <a:avLst/>
+          </a:prstGeom>
+          <a:noFill/>
+          <a:ln/>
+        </p:spPr>
+        <p:txBody>
+          <a:bodyPr wrap="square" lIns="0" tIns="0" rIns="0" bIns="0" rtlCol="0" anchor="ctr"/>
+          <a:lstStyle/>
+          <a:p>
+            <a:pPr indent="0" marL="0">
+              <a:buNone/>
+            </a:pPr>
+            <a:r>
+              <a:rPr lang="en-US" sz="1100" b="1" dirty="0">
+                <a:solidFill>
+                  <a:srgbClr val="92400E"/>
+                </a:solidFill>
+                <a:latin typeface="Calibri" pitchFamily="34" charset="0"/>
+                <a:ea typeface="Calibri" pitchFamily="34" charset="-122"/>
+                <a:cs typeface="Calibri" pitchFamily="34" charset="-120"/>
+              </a:rPr>
+              <a:t>DA UTILIZZARE OGGI</a:t>
+            </a:r>
+            <a:pPr indent="0" marL="0">
+              <a:buNone/>
+            </a:pPr>
+            <a:r>
+              <a:rPr lang="en-US" sz="1100" dirty="0">
+                <a:solidFill>
+                  <a:srgbClr val="92400E"/>
+                </a:solidFill>
+                <a:latin typeface="Calibri" pitchFamily="34" charset="0"/>
+                <a:ea typeface="Calibri" pitchFamily="34" charset="-122"/>
+                <a:cs typeface="Calibri" pitchFamily="34" charset="-120"/>
+              </a:rPr>
+              <a:t> · gli strumenti di PRG32</a:t>
+            </a:r>
+            <a:endParaRPr lang="en-US" sz="1100" dirty="0"/>
+          </a:p>
+        </p:txBody>
+      </p:sp>
+      <p:sp>
+        <p:nvSpPr>
           <p:cNvPr id="25" name="Slide Number Placeholder 0"/>
           <p:cNvSpPr>
             <a:spLocks noGrp="1"/>
@@ -5713,6 +6444,158 @@
                 <a:cs typeface="Calibri" pitchFamily="34" charset="-120"/>
               </a:rPr>
               <a:t>Schermo nero: confrontate il cablaggio del display con il firmware</a:t>
+            </a:r>
+            <a:endParaRPr lang="en-US" sz="1100" dirty="0"/>
+          </a:p>
+        </p:txBody>
+      </p:sp>
+      <p:sp>
+        <p:nvSpPr>
+          <p:cNvPr id="17" name="Shape 15"/>
+          <p:cNvSpPr/>
+          <p:nvPr/>
+        </p:nvSpPr>
+        <p:spPr>
+          <a:xfrm>
+            <a:off x="7875600" y="91440"/>
+            <a:ext cx="3767455" cy="274320"/>
+          </a:xfrm>
+          <a:prstGeom prst="rect">
+            <a:avLst/>
+          </a:prstGeom>
+          <a:solidFill>
+            <a:srgbClr val="FEF3C7"/>
+          </a:solidFill>
+          <a:ln w="12700">
+            <a:solidFill>
+              <a:srgbClr val="B45309"/>
+            </a:solidFill>
+            <a:prstDash val="solid"/>
+          </a:ln>
+        </p:spPr>
+      </p:sp>
+      <p:sp>
+        <p:nvSpPr>
+          <p:cNvPr id="18" name="Shape 16"/>
+          <p:cNvSpPr/>
+          <p:nvPr/>
+        </p:nvSpPr>
+        <p:spPr>
+          <a:xfrm>
+            <a:off x="7875600" y="91440"/>
+            <a:ext cx="27432" cy="274320"/>
+          </a:xfrm>
+          <a:prstGeom prst="rect">
+            <a:avLst/>
+          </a:prstGeom>
+          <a:solidFill>
+            <a:srgbClr val="B45309"/>
+          </a:solidFill>
+          <a:ln w="12700">
+            <a:solidFill>
+              <a:srgbClr val="B45309"/>
+            </a:solidFill>
+            <a:prstDash val="solid"/>
+          </a:ln>
+        </p:spPr>
+      </p:sp>
+      <p:sp>
+        <p:nvSpPr>
+          <p:cNvPr id="19" name="Shape 17"/>
+          <p:cNvSpPr/>
+          <p:nvPr/>
+        </p:nvSpPr>
+        <p:spPr>
+          <a:xfrm>
+            <a:off x="7930464" y="91440"/>
+            <a:ext cx="27432" cy="274320"/>
+          </a:xfrm>
+          <a:prstGeom prst="rect">
+            <a:avLst/>
+          </a:prstGeom>
+          <a:solidFill>
+            <a:srgbClr val="B45309"/>
+          </a:solidFill>
+          <a:ln w="12700">
+            <a:solidFill>
+              <a:srgbClr val="B45309"/>
+            </a:solidFill>
+            <a:prstDash val="solid"/>
+          </a:ln>
+        </p:spPr>
+      </p:sp>
+      <p:pic>
+        <p:nvPicPr>
+          <p:cNvPr id="20" name="Image 0" descr="preencoded.png">    </p:cNvPr>
+          <p:cNvPicPr>
+            <a:picLocks noChangeAspect="1"/>
+          </p:cNvPicPr>
+          <p:nvPr/>
+        </p:nvPicPr>
+        <p:blipFill>
+          <a:blip r:embed="rId1"/>
+          <a:stretch>
+            <a:fillRect/>
+          </a:stretch>
+        </p:blipFill>
+        <p:spPr>
+          <a:xfrm>
+            <a:off x="8003616" y="128016"/>
+            <a:ext cx="201168" cy="201168"/>
+          </a:xfrm>
+          <a:prstGeom prst="rect">
+            <a:avLst/>
+          </a:prstGeom>
+        </p:spPr>
+      </p:pic>
+      <p:sp>
+        <p:nvSpPr>
+          <p:cNvPr id="21" name="Text 18"/>
+          <p:cNvSpPr txBox="1"/>
+          <p:nvPr/>
+        </p:nvSpPr>
+        <p:spPr>
+          <a:xfrm>
+            <a:off x="8259648" y="91440"/>
+            <a:ext cx="3346831" cy="274320"/>
+          </a:xfrm>
+          <a:prstGeom prst="rect">
+            <a:avLst/>
+          </a:prstGeom>
+          <a:noFill/>
+          <a:ln/>
+        </p:spPr>
+        <p:txBody>
+          <a:bodyPr wrap="square" lIns="0" tIns="0" rIns="0" bIns="0" rtlCol="0" anchor="ctr"/>
+          <a:lstStyle/>
+          <a:p>
+            <a:pPr indent="0" marL="0">
+              <a:buNone/>
+            </a:pPr>
+            <a:r>
+              <a:rPr lang="en-US" sz="1100" b="1" dirty="0">
+                <a:solidFill>
+                  <a:srgbClr val="92400E"/>
+                </a:solidFill>
+                <a:latin typeface="Calibri" pitchFamily="34" charset="0"/>
+                <a:ea typeface="Calibri" pitchFamily="34" charset="-122"/>
+                <a:cs typeface="Calibri" pitchFamily="34" charset="-120"/>
+              </a:rPr>
+              <a:t>DA UTILIZZARE OGGI</a:t>
+            </a:r>
+            <a:pPr indent="0" marL="0">
+              <a:buNone/>
+            </a:pPr>
+            <a:r>
+              <a:rPr lang="en-US" sz="1100" dirty="0">
+                <a:solidFill>
+                  <a:srgbClr val="92400E"/>
+                </a:solidFill>
+                <a:latin typeface="Calibri" pitchFamily="34" charset="0"/>
+                <a:ea typeface="Calibri" pitchFamily="34" charset="-122"/>
+                <a:cs typeface="Calibri" pitchFamily="34" charset="-120"/>
+              </a:rPr>
+              <a:t> · gli strumenti di PRG32</a:t>
             </a:r>
             <a:endParaRPr lang="en-US" sz="1100" dirty="0"/>
           </a:p>
@@ -7101,6 +7984,158 @@
       </p:graphicFrame>
       <p:sp>
         <p:nvSpPr>
+          <p:cNvPr id="4" name="Shape 1"/>
+          <p:cNvSpPr/>
+          <p:nvPr/>
+        </p:nvSpPr>
+        <p:spPr>
+          <a:xfrm>
+            <a:off x="7875600" y="91440"/>
+            <a:ext cx="3767455" cy="274320"/>
+          </a:xfrm>
+          <a:prstGeom prst="rect">
+            <a:avLst/>
+          </a:prstGeom>
+          <a:solidFill>
+            <a:srgbClr val="FEF3C7"/>
+          </a:solidFill>
+          <a:ln w="12700">
+            <a:solidFill>
+              <a:srgbClr val="B45309"/>
+            </a:solidFill>
+            <a:prstDash val="solid"/>
+          </a:ln>
+        </p:spPr>
+      </p:sp>
+      <p:sp>
+        <p:nvSpPr>
+          <p:cNvPr id="5" name="Shape 2"/>
+          <p:cNvSpPr/>
+          <p:nvPr/>
+        </p:nvSpPr>
+        <p:spPr>
+          <a:xfrm>
+            <a:off x="7875600" y="91440"/>
+            <a:ext cx="27432" cy="274320"/>
+          </a:xfrm>
+          <a:prstGeom prst="rect">
+            <a:avLst/>
+          </a:prstGeom>
+          <a:solidFill>
+            <a:srgbClr val="B45309"/>
+          </a:solidFill>
+          <a:ln w="12700">
+            <a:solidFill>
+              <a:srgbClr val="B45309"/>
+            </a:solidFill>
+            <a:prstDash val="solid"/>
+          </a:ln>
+        </p:spPr>
+      </p:sp>
+      <p:sp>
+        <p:nvSpPr>
+          <p:cNvPr id="6" name="Shape 3"/>
+          <p:cNvSpPr/>
+          <p:nvPr/>
+        </p:nvSpPr>
+        <p:spPr>
+          <a:xfrm>
+            <a:off x="7930464" y="91440"/>
+            <a:ext cx="27432" cy="274320"/>
+          </a:xfrm>
+          <a:prstGeom prst="rect">
+            <a:avLst/>
+          </a:prstGeom>
+          <a:solidFill>
+            <a:srgbClr val="B45309"/>
+          </a:solidFill>
+          <a:ln w="12700">
+            <a:solidFill>
+              <a:srgbClr val="B45309"/>
+            </a:solidFill>
+            <a:prstDash val="solid"/>
+          </a:ln>
+        </p:spPr>
+      </p:sp>
+      <p:pic>
+        <p:nvPicPr>
+          <p:cNvPr id="7" name="Image 0" descr="preencoded.png">    </p:cNvPr>
+          <p:cNvPicPr>
+            <a:picLocks noChangeAspect="1"/>
+          </p:cNvPicPr>
+          <p:nvPr/>
+        </p:nvPicPr>
+        <p:blipFill>
+          <a:blip r:embed="rId1"/>
+          <a:stretch>
+            <a:fillRect/>
+          </a:stretch>
+        </p:blipFill>
+        <p:spPr>
+          <a:xfrm>
+            <a:off x="8003616" y="128016"/>
+            <a:ext cx="201168" cy="201168"/>
+          </a:xfrm>
+          <a:prstGeom prst="rect">
+            <a:avLst/>
+          </a:prstGeom>
+        </p:spPr>
+      </p:pic>
+      <p:sp>
+        <p:nvSpPr>
+          <p:cNvPr id="8" name="Text 4"/>
+          <p:cNvSpPr txBox="1"/>
+          <p:nvPr/>
+        </p:nvSpPr>
+        <p:spPr>
+          <a:xfrm>
+            <a:off x="8259648" y="91440"/>
+            <a:ext cx="3346831" cy="274320"/>
+          </a:xfrm>
+          <a:prstGeom prst="rect">
+            <a:avLst/>
+          </a:prstGeom>
+          <a:noFill/>
+          <a:ln/>
+        </p:spPr>
+        <p:txBody>
+          <a:bodyPr wrap="square" lIns="0" tIns="0" rIns="0" bIns="0" rtlCol="0" anchor="ctr"/>
+          <a:lstStyle/>
+          <a:p>
+            <a:pPr indent="0" marL="0">
+              <a:buNone/>
+            </a:pPr>
+            <a:r>
+              <a:rPr lang="en-US" sz="1100" b="1" dirty="0">
+                <a:solidFill>
+                  <a:srgbClr val="92400E"/>
+                </a:solidFill>
+                <a:latin typeface="Calibri" pitchFamily="34" charset="0"/>
+                <a:ea typeface="Calibri" pitchFamily="34" charset="-122"/>
+                <a:cs typeface="Calibri" pitchFamily="34" charset="-120"/>
+              </a:rPr>
+              <a:t>DA UTILIZZARE OGGI</a:t>
+            </a:r>
+            <a:pPr indent="0" marL="0">
+              <a:buNone/>
+            </a:pPr>
+            <a:r>
+              <a:rPr lang="en-US" sz="1100" dirty="0">
+                <a:solidFill>
+                  <a:srgbClr val="92400E"/>
+                </a:solidFill>
+                <a:latin typeface="Calibri" pitchFamily="34" charset="0"/>
+                <a:ea typeface="Calibri" pitchFamily="34" charset="-122"/>
+                <a:cs typeface="Calibri" pitchFamily="34" charset="-120"/>
+              </a:rPr>
+              <a:t> · gli strumenti di PRG32</a:t>
+            </a:r>
+            <a:endParaRPr lang="en-US" sz="1100" dirty="0"/>
+          </a:p>
+        </p:txBody>
+      </p:sp>
+      <p:sp>
+        <p:nvSpPr>
           <p:cNvPr id="25" name="Slide Number Placeholder 0"/>
           <p:cNvSpPr>
             <a:spLocks noGrp="1"/>
@@ -9503,6 +10538,133 @@
       </p:sp>
       <p:sp>
         <p:nvSpPr>
+          <p:cNvPr id="17" name="Shape 15"/>
+          <p:cNvSpPr/>
+          <p:nvPr/>
+        </p:nvSpPr>
+        <p:spPr>
+          <a:xfrm>
+            <a:off x="7723327" y="91440"/>
+            <a:ext cx="3919728" cy="274320"/>
+          </a:xfrm>
+          <a:prstGeom prst="rect">
+            <a:avLst/>
+          </a:prstGeom>
+          <a:solidFill>
+            <a:srgbClr val="E0F2FE"/>
+          </a:solidFill>
+          <a:ln w="12700">
+            <a:solidFill>
+              <a:srgbClr val="0369A1"/>
+            </a:solidFill>
+            <a:prstDash val="solid"/>
+          </a:ln>
+        </p:spPr>
+      </p:sp>
+      <p:sp>
+        <p:nvSpPr>
+          <p:cNvPr id="18" name="Shape 16"/>
+          <p:cNvSpPr/>
+          <p:nvPr/>
+        </p:nvSpPr>
+        <p:spPr>
+          <a:xfrm>
+            <a:off x="7723327" y="91440"/>
+            <a:ext cx="73152" cy="274320"/>
+          </a:xfrm>
+          <a:prstGeom prst="rect">
+            <a:avLst/>
+          </a:prstGeom>
+          <a:solidFill>
+            <a:srgbClr val="0369A1"/>
+          </a:solidFill>
+          <a:ln w="12700">
+            <a:solidFill>
+              <a:srgbClr val="0369A1"/>
+            </a:solidFill>
+            <a:prstDash val="solid"/>
+          </a:ln>
+        </p:spPr>
+      </p:sp>
+      <p:pic>
+        <p:nvPicPr>
+          <p:cNvPr id="19" name="Image 0" descr="preencoded.png">    </p:cNvPr>
+          <p:cNvPicPr>
+            <a:picLocks noChangeAspect="1"/>
+          </p:cNvPicPr>
+          <p:nvPr/>
+        </p:nvPicPr>
+        <p:blipFill>
+          <a:blip r:embed="rId1"/>
+          <a:stretch>
+            <a:fillRect/>
+          </a:stretch>
+        </p:blipFill>
+        <p:spPr>
+          <a:xfrm>
+            <a:off x="7851343" y="128016"/>
+            <a:ext cx="201168" cy="201168"/>
+          </a:xfrm>
+          <a:prstGeom prst="rect">
+            <a:avLst/>
+          </a:prstGeom>
+        </p:spPr>
+      </p:pic>
+      <p:sp>
+        <p:nvSpPr>
+          <p:cNvPr id="20" name="Text 17"/>
+          <p:cNvSpPr txBox="1"/>
+          <p:nvPr/>
+        </p:nvSpPr>
+        <p:spPr>
+          <a:xfrm>
+            <a:off x="8107375" y="91440"/>
+            <a:ext cx="3499104" cy="274320"/>
+          </a:xfrm>
+          <a:prstGeom prst="rect">
+            <a:avLst/>
+          </a:prstGeom>
+          <a:noFill/>
+          <a:ln/>
+        </p:spPr>
+        <p:txBody>
+          <a:bodyPr wrap="square" lIns="0" tIns="0" rIns="0" bIns="0" rtlCol="0" anchor="ctr"/>
+          <a:lstStyle/>
+          <a:p>
+            <a:pPr indent="0" marL="0">
+              <a:buNone/>
+            </a:pPr>
+            <a:r>
+              <a:rPr lang="en-US" sz="1100" b="1" dirty="0">
+                <a:solidFill>
+                  <a:srgbClr val="075985"/>
+                </a:solidFill>
+                <a:latin typeface="Calibri" pitchFamily="34" charset="0"/>
+                <a:ea typeface="Calibri" pitchFamily="34" charset="-122"/>
+                <a:cs typeface="Calibri" pitchFamily="34" charset="-120"/>
+              </a:rPr>
+              <a:t>DA COMPRENDERE OGGI</a:t>
+            </a:r>
+            <a:pPr indent="0" marL="0">
+              <a:buNone/>
+            </a:pPr>
+            <a:r>
+              <a:rPr lang="en-US" sz="1100" dirty="0">
+                <a:solidFill>
+                  <a:srgbClr val="075985"/>
+                </a:solidFill>
+                <a:latin typeface="Calibri" pitchFamily="34" charset="0"/>
+                <a:ea typeface="Calibri" pitchFamily="34" charset="-122"/>
+                <a:cs typeface="Calibri" pitchFamily="34" charset="-120"/>
+              </a:rPr>
+              <a:t> · macchine a stati finiti</a:t>
+            </a:r>
+            <a:endParaRPr lang="en-US" sz="1100" dirty="0"/>
+          </a:p>
+        </p:txBody>
+      </p:sp>
+      <p:sp>
+        <p:nvSpPr>
           <p:cNvPr id="25" name="Slide Number Placeholder 0"/>
           <p:cNvSpPr>
             <a:spLocks noGrp="1"/>
@@ -9642,9 +10804,59 @@
           </a:ln>
         </p:spPr>
       </p:sp>
+      <p:sp>
+        <p:nvSpPr>
+          <p:cNvPr id="4" name="Shape 2"/>
+          <p:cNvSpPr/>
+          <p:nvPr/>
+        </p:nvSpPr>
+        <p:spPr>
+          <a:xfrm>
+            <a:off x="7723327" y="91440"/>
+            <a:ext cx="3919728" cy="274320"/>
+          </a:xfrm>
+          <a:prstGeom prst="rect">
+            <a:avLst/>
+          </a:prstGeom>
+          <a:solidFill>
+            <a:srgbClr val="E0F2FE"/>
+          </a:solidFill>
+          <a:ln w="12700">
+            <a:solidFill>
+              <a:srgbClr val="0369A1"/>
+            </a:solidFill>
+            <a:prstDash val="solid"/>
+          </a:ln>
+        </p:spPr>
+      </p:sp>
+      <p:sp>
+        <p:nvSpPr>
+          <p:cNvPr id="5" name="Shape 3"/>
+          <p:cNvSpPr/>
+          <p:nvPr/>
+        </p:nvSpPr>
+        <p:spPr>
+          <a:xfrm>
+            <a:off x="7723327" y="91440"/>
+            <a:ext cx="73152" cy="274320"/>
+          </a:xfrm>
+          <a:prstGeom prst="rect">
+            <a:avLst/>
+          </a:prstGeom>
+          <a:solidFill>
+            <a:srgbClr val="0369A1"/>
+          </a:solidFill>
+          <a:ln w="12700">
+            <a:solidFill>
+              <a:srgbClr val="0369A1"/>
+            </a:solidFill>
+            <a:prstDash val="solid"/>
+          </a:ln>
+        </p:spPr>
+      </p:sp>
       <p:pic>
         <p:nvPicPr>
-          <p:cNvPr id="5" name="Image 0" descr="preencoded.png">    </p:cNvPr>
+          <p:cNvPr id="6" name="Image 0" descr="preencoded.png">    </p:cNvPr>
           <p:cNvPicPr>
             <a:picLocks noChangeAspect="1"/>
           </p:cNvPicPr>
@@ -9652,6 +10864,83 @@
         </p:nvPicPr>
         <p:blipFill>
           <a:blip r:embed="rId1"/>
+          <a:stretch>
+            <a:fillRect/>
+          </a:stretch>
+        </p:blipFill>
+        <p:spPr>
+          <a:xfrm>
+            <a:off x="7851343" y="128016"/>
+            <a:ext cx="201168" cy="201168"/>
+          </a:xfrm>
+          <a:prstGeom prst="rect">
+            <a:avLst/>
+          </a:prstGeom>
+        </p:spPr>
+      </p:pic>
+      <p:sp>
+        <p:nvSpPr>
+          <p:cNvPr id="7" name="Text 4"/>
+          <p:cNvSpPr txBox="1"/>
+          <p:nvPr/>
+        </p:nvSpPr>
+        <p:spPr>
+          <a:xfrm>
+            <a:off x="8107375" y="91440"/>
+            <a:ext cx="3499104" cy="274320"/>
+          </a:xfrm>
+          <a:prstGeom prst="rect">
+            <a:avLst/>
+          </a:prstGeom>
+          <a:noFill/>
+          <a:ln/>
+        </p:spPr>
+        <p:txBody>
+          <a:bodyPr wrap="square" lIns="0" tIns="0" rIns="0" bIns="0" rtlCol="0" anchor="ctr"/>
+          <a:lstStyle/>
+          <a:p>
+            <a:pPr indent="0" marL="0">
+              <a:buNone/>
+            </a:pPr>
+            <a:r>
+              <a:rPr lang="en-US" sz="1100" b="1" dirty="0">
+                <a:solidFill>
+                  <a:srgbClr val="075985"/>
+                </a:solidFill>
+                <a:latin typeface="Calibri" pitchFamily="34" charset="0"/>
+                <a:ea typeface="Calibri" pitchFamily="34" charset="-122"/>
+                <a:cs typeface="Calibri" pitchFamily="34" charset="-120"/>
+              </a:rPr>
+              <a:t>DA COMPRENDERE OGGI</a:t>
+            </a:r>
+            <a:pPr indent="0" marL="0">
+              <a:buNone/>
+            </a:pPr>
+            <a:r>
+              <a:rPr lang="en-US" sz="1100" dirty="0">
+                <a:solidFill>
+                  <a:srgbClr val="075985"/>
+                </a:solidFill>
+                <a:latin typeface="Calibri" pitchFamily="34" charset="0"/>
+                <a:ea typeface="Calibri" pitchFamily="34" charset="-122"/>
+                <a:cs typeface="Calibri" pitchFamily="34" charset="-120"/>
+              </a:rPr>
+              <a:t> · macchine a stati finiti</a:t>
+            </a:r>
+            <a:endParaRPr lang="en-US" sz="1100" dirty="0"/>
+          </a:p>
+        </p:txBody>
+      </p:sp>
+      <p:pic>
+        <p:nvPicPr>
+          <p:cNvPr id="9" name="Image 1" descr="preencoded.png">    </p:cNvPr>
+          <p:cNvPicPr>
+            <a:picLocks noChangeAspect="1"/>
+          </p:cNvPicPr>
+          <p:nvPr/>
+        </p:nvPicPr>
+        <p:blipFill>
+          <a:blip r:embed="rId2"/>
           <a:stretch>
             <a:fillRect/>
           </a:stretch>
@@ -11814,6 +13103,133 @@
       </p:sp>
       <p:sp>
         <p:nvSpPr>
+          <p:cNvPr id="29" name="Shape 27"/>
+          <p:cNvSpPr/>
+          <p:nvPr/>
+        </p:nvSpPr>
+        <p:spPr>
+          <a:xfrm>
+            <a:off x="7592009" y="91440"/>
+            <a:ext cx="4051046" cy="274320"/>
+          </a:xfrm>
+          <a:prstGeom prst="rect">
+            <a:avLst/>
+          </a:prstGeom>
+          <a:solidFill>
+            <a:srgbClr val="E0F2FE"/>
+          </a:solidFill>
+          <a:ln w="12700">
+            <a:solidFill>
+              <a:srgbClr val="0369A1"/>
+            </a:solidFill>
+            <a:prstDash val="solid"/>
+          </a:ln>
+        </p:spPr>
+      </p:sp>
+      <p:sp>
+        <p:nvSpPr>
+          <p:cNvPr id="30" name="Shape 28"/>
+          <p:cNvSpPr/>
+          <p:nvPr/>
+        </p:nvSpPr>
+        <p:spPr>
+          <a:xfrm>
+            <a:off x="7592009" y="91440"/>
+            <a:ext cx="73152" cy="274320"/>
+          </a:xfrm>
+          <a:prstGeom prst="rect">
+            <a:avLst/>
+          </a:prstGeom>
+          <a:solidFill>
+            <a:srgbClr val="0369A1"/>
+          </a:solidFill>
+          <a:ln w="12700">
+            <a:solidFill>
+              <a:srgbClr val="0369A1"/>
+            </a:solidFill>
+            <a:prstDash val="solid"/>
+          </a:ln>
+        </p:spPr>
+      </p:sp>
+      <p:pic>
+        <p:nvPicPr>
+          <p:cNvPr id="31" name="Image 0" descr="preencoded.png">    </p:cNvPr>
+          <p:cNvPicPr>
+            <a:picLocks noChangeAspect="1"/>
+          </p:cNvPicPr>
+          <p:nvPr/>
+        </p:nvPicPr>
+        <p:blipFill>
+          <a:blip r:embed="rId1"/>
+          <a:stretch>
+            <a:fillRect/>
+          </a:stretch>
+        </p:blipFill>
+        <p:spPr>
+          <a:xfrm>
+            <a:off x="7720025" y="128016"/>
+            <a:ext cx="201168" cy="201168"/>
+          </a:xfrm>
+          <a:prstGeom prst="rect">
+            <a:avLst/>
+          </a:prstGeom>
+        </p:spPr>
+      </p:pic>
+      <p:sp>
+        <p:nvSpPr>
+          <p:cNvPr id="32" name="Text 29"/>
+          <p:cNvSpPr txBox="1"/>
+          <p:nvPr/>
+        </p:nvSpPr>
+        <p:spPr>
+          <a:xfrm>
+            <a:off x="7976057" y="91440"/>
+            <a:ext cx="3630422" cy="274320"/>
+          </a:xfrm>
+          <a:prstGeom prst="rect">
+            <a:avLst/>
+          </a:prstGeom>
+          <a:noFill/>
+          <a:ln/>
+        </p:spPr>
+        <p:txBody>
+          <a:bodyPr wrap="square" lIns="0" tIns="0" rIns="0" bIns="0" rtlCol="0" anchor="ctr"/>
+          <a:lstStyle/>
+          <a:p>
+            <a:pPr indent="0" marL="0">
+              <a:buNone/>
+            </a:pPr>
+            <a:r>
+              <a:rPr lang="en-US" sz="1100" b="1" dirty="0">
+                <a:solidFill>
+                  <a:srgbClr val="075985"/>
+                </a:solidFill>
+                <a:latin typeface="Calibri" pitchFamily="34" charset="0"/>
+                <a:ea typeface="Calibri" pitchFamily="34" charset="-122"/>
+                <a:cs typeface="Calibri" pitchFamily="34" charset="-120"/>
+              </a:rPr>
+              <a:t>DA COMPRENDERE OGGI</a:t>
+            </a:r>
+            <a:pPr indent="0" marL="0">
+              <a:buNone/>
+            </a:pPr>
+            <a:r>
+              <a:rPr lang="en-US" sz="1100" dirty="0">
+                <a:solidFill>
+                  <a:srgbClr val="075985"/>
+                </a:solidFill>
+                <a:latin typeface="Calibri" pitchFamily="34" charset="0"/>
+                <a:ea typeface="Calibri" pitchFamily="34" charset="-122"/>
+                <a:cs typeface="Calibri" pitchFamily="34" charset="-120"/>
+              </a:rPr>
+              <a:t> · i registri come flip-flop</a:t>
+            </a:r>
+            <a:endParaRPr lang="en-US" sz="1100" dirty="0"/>
+          </a:p>
+        </p:txBody>
+      </p:sp>
+      <p:sp>
+        <p:nvSpPr>
           <p:cNvPr id="25" name="Slide Number Placeholder 0"/>
           <p:cNvSpPr>
             <a:spLocks noGrp="1"/>
@@ -12521,6 +13937,133 @@
       </p:sp>
       <p:sp>
         <p:nvSpPr>
+          <p:cNvPr id="20" name="Shape 18"/>
+          <p:cNvSpPr/>
+          <p:nvPr/>
+        </p:nvSpPr>
+        <p:spPr>
+          <a:xfrm>
+            <a:off x="7723327" y="91440"/>
+            <a:ext cx="3919728" cy="274320"/>
+          </a:xfrm>
+          <a:prstGeom prst="rect">
+            <a:avLst/>
+          </a:prstGeom>
+          <a:solidFill>
+            <a:srgbClr val="E0F2FE"/>
+          </a:solidFill>
+          <a:ln w="12700">
+            <a:solidFill>
+              <a:srgbClr val="0369A1"/>
+            </a:solidFill>
+            <a:prstDash val="solid"/>
+          </a:ln>
+        </p:spPr>
+      </p:sp>
+      <p:sp>
+        <p:nvSpPr>
+          <p:cNvPr id="21" name="Shape 19"/>
+          <p:cNvSpPr/>
+          <p:nvPr/>
+        </p:nvSpPr>
+        <p:spPr>
+          <a:xfrm>
+            <a:off x="7723327" y="91440"/>
+            <a:ext cx="73152" cy="274320"/>
+          </a:xfrm>
+          <a:prstGeom prst="rect">
+            <a:avLst/>
+          </a:prstGeom>
+          <a:solidFill>
+            <a:srgbClr val="0369A1"/>
+          </a:solidFill>
+          <a:ln w="12700">
+            <a:solidFill>
+              <a:srgbClr val="0369A1"/>
+            </a:solidFill>
+            <a:prstDash val="solid"/>
+          </a:ln>
+        </p:spPr>
+      </p:sp>
+      <p:pic>
+        <p:nvPicPr>
+          <p:cNvPr id="22" name="Image 0" descr="preencoded.png">    </p:cNvPr>
+          <p:cNvPicPr>
+            <a:picLocks noChangeAspect="1"/>
+          </p:cNvPicPr>
+          <p:nvPr/>
+        </p:nvPicPr>
+        <p:blipFill>
+          <a:blip r:embed="rId1"/>
+          <a:stretch>
+            <a:fillRect/>
+          </a:stretch>
+        </p:blipFill>
+        <p:spPr>
+          <a:xfrm>
+            <a:off x="7851343" y="128016"/>
+            <a:ext cx="201168" cy="201168"/>
+          </a:xfrm>
+          <a:prstGeom prst="rect">
+            <a:avLst/>
+          </a:prstGeom>
+        </p:spPr>
+      </p:pic>
+      <p:sp>
+        <p:nvSpPr>
+          <p:cNvPr id="23" name="Text 20"/>
+          <p:cNvSpPr txBox="1"/>
+          <p:nvPr/>
+        </p:nvSpPr>
+        <p:spPr>
+          <a:xfrm>
+            <a:off x="8107375" y="91440"/>
+            <a:ext cx="3499104" cy="274320"/>
+          </a:xfrm>
+          <a:prstGeom prst="rect">
+            <a:avLst/>
+          </a:prstGeom>
+          <a:noFill/>
+          <a:ln/>
+        </p:spPr>
+        <p:txBody>
+          <a:bodyPr wrap="square" lIns="0" tIns="0" rIns="0" bIns="0" rtlCol="0" anchor="ctr"/>
+          <a:lstStyle/>
+          <a:p>
+            <a:pPr indent="0" marL="0">
+              <a:buNone/>
+            </a:pPr>
+            <a:r>
+              <a:rPr lang="en-US" sz="1100" b="1" dirty="0">
+                <a:solidFill>
+                  <a:srgbClr val="075985"/>
+                </a:solidFill>
+                <a:latin typeface="Calibri" pitchFamily="34" charset="0"/>
+                <a:ea typeface="Calibri" pitchFamily="34" charset="-122"/>
+                <a:cs typeface="Calibri" pitchFamily="34" charset="-120"/>
+              </a:rPr>
+              <a:t>DA COMPRENDERE OGGI</a:t>
+            </a:r>
+            <a:pPr indent="0" marL="0">
+              <a:buNone/>
+            </a:pPr>
+            <a:r>
+              <a:rPr lang="en-US" sz="1100" dirty="0">
+                <a:solidFill>
+                  <a:srgbClr val="075985"/>
+                </a:solidFill>
+                <a:latin typeface="Calibri" pitchFamily="34" charset="0"/>
+                <a:ea typeface="Calibri" pitchFamily="34" charset="-122"/>
+                <a:cs typeface="Calibri" pitchFamily="34" charset="-120"/>
+              </a:rPr>
+              <a:t> · macchine a stati finiti</a:t>
+            </a:r>
+            <a:endParaRPr lang="en-US" sz="1100" dirty="0"/>
+          </a:p>
+        </p:txBody>
+      </p:sp>
+      <p:sp>
+        <p:nvSpPr>
           <p:cNvPr id="25" name="Slide Number Placeholder 0"/>
           <p:cNvSpPr>
             <a:spLocks noGrp="1"/>
@@ -13041,6 +14584,158 @@
       </p:sp>
       <p:sp>
         <p:nvSpPr>
+          <p:cNvPr id="5" name="Shape 3"/>
+          <p:cNvSpPr/>
+          <p:nvPr/>
+        </p:nvSpPr>
+        <p:spPr>
+          <a:xfrm>
+            <a:off x="7941259" y="91440"/>
+            <a:ext cx="3701796" cy="274320"/>
+          </a:xfrm>
+          <a:prstGeom prst="rect">
+            <a:avLst/>
+          </a:prstGeom>
+          <a:solidFill>
+            <a:srgbClr val="FEF3C7"/>
+          </a:solidFill>
+          <a:ln w="12700">
+            <a:solidFill>
+              <a:srgbClr val="B45309"/>
+            </a:solidFill>
+            <a:prstDash val="solid"/>
+          </a:ln>
+        </p:spPr>
+      </p:sp>
+      <p:sp>
+        <p:nvSpPr>
+          <p:cNvPr id="6" name="Shape 4"/>
+          <p:cNvSpPr/>
+          <p:nvPr/>
+        </p:nvSpPr>
+        <p:spPr>
+          <a:xfrm>
+            <a:off x="7941259" y="91440"/>
+            <a:ext cx="27432" cy="274320"/>
+          </a:xfrm>
+          <a:prstGeom prst="rect">
+            <a:avLst/>
+          </a:prstGeom>
+          <a:solidFill>
+            <a:srgbClr val="B45309"/>
+          </a:solidFill>
+          <a:ln w="12700">
+            <a:solidFill>
+              <a:srgbClr val="B45309"/>
+            </a:solidFill>
+            <a:prstDash val="solid"/>
+          </a:ln>
+        </p:spPr>
+      </p:sp>
+      <p:sp>
+        <p:nvSpPr>
+          <p:cNvPr id="7" name="Shape 5"/>
+          <p:cNvSpPr/>
+          <p:nvPr/>
+        </p:nvSpPr>
+        <p:spPr>
+          <a:xfrm>
+            <a:off x="7996123" y="91440"/>
+            <a:ext cx="27432" cy="274320"/>
+          </a:xfrm>
+          <a:prstGeom prst="rect">
+            <a:avLst/>
+          </a:prstGeom>
+          <a:solidFill>
+            <a:srgbClr val="B45309"/>
+          </a:solidFill>
+          <a:ln w="12700">
+            <a:solidFill>
+              <a:srgbClr val="B45309"/>
+            </a:solidFill>
+            <a:prstDash val="solid"/>
+          </a:ln>
+        </p:spPr>
+      </p:sp>
+      <p:pic>
+        <p:nvPicPr>
+          <p:cNvPr id="8" name="Image 0" descr="preencoded.png">    </p:cNvPr>
+          <p:cNvPicPr>
+            <a:picLocks noChangeAspect="1"/>
+          </p:cNvPicPr>
+          <p:nvPr/>
+        </p:nvPicPr>
+        <p:blipFill>
+          <a:blip r:embed="rId1"/>
+          <a:stretch>
+            <a:fillRect/>
+          </a:stretch>
+        </p:blipFill>
+        <p:spPr>
+          <a:xfrm>
+            <a:off x="8069275" y="128016"/>
+            <a:ext cx="201168" cy="201168"/>
+          </a:xfrm>
+          <a:prstGeom prst="rect">
+            <a:avLst/>
+          </a:prstGeom>
+        </p:spPr>
+      </p:pic>
+      <p:sp>
+        <p:nvSpPr>
+          <p:cNvPr id="9" name="Text 6"/>
+          <p:cNvSpPr txBox="1"/>
+          <p:nvPr/>
+        </p:nvSpPr>
+        <p:spPr>
+          <a:xfrm>
+            <a:off x="8325307" y="91440"/>
+            <a:ext cx="3281172" cy="274320"/>
+          </a:xfrm>
+          <a:prstGeom prst="rect">
+            <a:avLst/>
+          </a:prstGeom>
+          <a:noFill/>
+          <a:ln/>
+        </p:spPr>
+        <p:txBody>
+          <a:bodyPr wrap="square" lIns="0" tIns="0" rIns="0" bIns="0" rtlCol="0" anchor="ctr"/>
+          <a:lstStyle/>
+          <a:p>
+            <a:pPr indent="0" marL="0">
+              <a:buNone/>
+            </a:pPr>
+            <a:r>
+              <a:rPr lang="en-US" sz="1100" b="1" dirty="0">
+                <a:solidFill>
+                  <a:srgbClr val="92400E"/>
+                </a:solidFill>
+                <a:latin typeface="Calibri" pitchFamily="34" charset="0"/>
+                <a:ea typeface="Calibri" pitchFamily="34" charset="-122"/>
+                <a:cs typeface="Calibri" pitchFamily="34" charset="-120"/>
+              </a:rPr>
+              <a:t>DA UTILIZZARE OGGI</a:t>
+            </a:r>
+            <a:pPr indent="0" marL="0">
+              <a:buNone/>
+            </a:pPr>
+            <a:r>
+              <a:rPr lang="en-US" sz="1100" dirty="0">
+                <a:solidFill>
+                  <a:srgbClr val="92400E"/>
+                </a:solidFill>
+                <a:latin typeface="Calibri" pitchFamily="34" charset="0"/>
+                <a:ea typeface="Calibri" pitchFamily="34" charset="-122"/>
+                <a:cs typeface="Calibri" pitchFamily="34" charset="-120"/>
+              </a:rPr>
+              <a:t> · il programma completo</a:t>
+            </a:r>
+            <a:endParaRPr lang="en-US" sz="1100" dirty="0"/>
+          </a:p>
+        </p:txBody>
+      </p:sp>
+      <p:sp>
+        <p:nvSpPr>
           <p:cNvPr id="25" name="Slide Number Placeholder 0"/>
           <p:cNvSpPr>
             <a:spLocks noGrp="1"/>
@@ -13721,6 +15416,158 @@
       </p:sp>
       <p:sp>
         <p:nvSpPr>
+          <p:cNvPr id="5" name="Shape 3"/>
+          <p:cNvSpPr/>
+          <p:nvPr/>
+        </p:nvSpPr>
+        <p:spPr>
+          <a:xfrm>
+            <a:off x="7941259" y="91440"/>
+            <a:ext cx="3701796" cy="274320"/>
+          </a:xfrm>
+          <a:prstGeom prst="rect">
+            <a:avLst/>
+          </a:prstGeom>
+          <a:solidFill>
+            <a:srgbClr val="FEF3C7"/>
+          </a:solidFill>
+          <a:ln w="12700">
+            <a:solidFill>
+              <a:srgbClr val="B45309"/>
+            </a:solidFill>
+            <a:prstDash val="solid"/>
+          </a:ln>
+        </p:spPr>
+      </p:sp>
+      <p:sp>
+        <p:nvSpPr>
+          <p:cNvPr id="6" name="Shape 4"/>
+          <p:cNvSpPr/>
+          <p:nvPr/>
+        </p:nvSpPr>
+        <p:spPr>
+          <a:xfrm>
+            <a:off x="7941259" y="91440"/>
+            <a:ext cx="27432" cy="274320"/>
+          </a:xfrm>
+          <a:prstGeom prst="rect">
+            <a:avLst/>
+          </a:prstGeom>
+          <a:solidFill>
+            <a:srgbClr val="B45309"/>
+          </a:solidFill>
+          <a:ln w="12700">
+            <a:solidFill>
+              <a:srgbClr val="B45309"/>
+            </a:solidFill>
+            <a:prstDash val="solid"/>
+          </a:ln>
+        </p:spPr>
+      </p:sp>
+      <p:sp>
+        <p:nvSpPr>
+          <p:cNvPr id="7" name="Shape 5"/>
+          <p:cNvSpPr/>
+          <p:nvPr/>
+        </p:nvSpPr>
+        <p:spPr>
+          <a:xfrm>
+            <a:off x="7996123" y="91440"/>
+            <a:ext cx="27432" cy="274320"/>
+          </a:xfrm>
+          <a:prstGeom prst="rect">
+            <a:avLst/>
+          </a:prstGeom>
+          <a:solidFill>
+            <a:srgbClr val="B45309"/>
+          </a:solidFill>
+          <a:ln w="12700">
+            <a:solidFill>
+              <a:srgbClr val="B45309"/>
+            </a:solidFill>
+            <a:prstDash val="solid"/>
+          </a:ln>
+        </p:spPr>
+      </p:sp>
+      <p:pic>
+        <p:nvPicPr>
+          <p:cNvPr id="8" name="Image 0" descr="preencoded.png">    </p:cNvPr>
+          <p:cNvPicPr>
+            <a:picLocks noChangeAspect="1"/>
+          </p:cNvPicPr>
+          <p:nvPr/>
+        </p:nvPicPr>
+        <p:blipFill>
+          <a:blip r:embed="rId1"/>
+          <a:stretch>
+            <a:fillRect/>
+          </a:stretch>
+        </p:blipFill>
+        <p:spPr>
+          <a:xfrm>
+            <a:off x="8069275" y="128016"/>
+            <a:ext cx="201168" cy="201168"/>
+          </a:xfrm>
+          <a:prstGeom prst="rect">
+            <a:avLst/>
+          </a:prstGeom>
+        </p:spPr>
+      </p:pic>
+      <p:sp>
+        <p:nvSpPr>
+          <p:cNvPr id="9" name="Text 6"/>
+          <p:cNvSpPr txBox="1"/>
+          <p:nvPr/>
+        </p:nvSpPr>
+        <p:spPr>
+          <a:xfrm>
+            <a:off x="8325307" y="91440"/>
+            <a:ext cx="3281172" cy="274320"/>
+          </a:xfrm>
+          <a:prstGeom prst="rect">
+            <a:avLst/>
+          </a:prstGeom>
+          <a:noFill/>
+          <a:ln/>
+        </p:spPr>
+        <p:txBody>
+          <a:bodyPr wrap="square" lIns="0" tIns="0" rIns="0" bIns="0" rtlCol="0" anchor="ctr"/>
+          <a:lstStyle/>
+          <a:p>
+            <a:pPr indent="0" marL="0">
+              <a:buNone/>
+            </a:pPr>
+            <a:r>
+              <a:rPr lang="en-US" sz="1100" b="1" dirty="0">
+                <a:solidFill>
+                  <a:srgbClr val="92400E"/>
+                </a:solidFill>
+                <a:latin typeface="Calibri" pitchFamily="34" charset="0"/>
+                <a:ea typeface="Calibri" pitchFamily="34" charset="-122"/>
+                <a:cs typeface="Calibri" pitchFamily="34" charset="-120"/>
+              </a:rPr>
+              <a:t>DA UTILIZZARE OGGI</a:t>
+            </a:r>
+            <a:pPr indent="0" marL="0">
+              <a:buNone/>
+            </a:pPr>
+            <a:r>
+              <a:rPr lang="en-US" sz="1100" dirty="0">
+                <a:solidFill>
+                  <a:srgbClr val="92400E"/>
+                </a:solidFill>
+                <a:latin typeface="Calibri" pitchFamily="34" charset="0"/>
+                <a:ea typeface="Calibri" pitchFamily="34" charset="-122"/>
+                <a:cs typeface="Calibri" pitchFamily="34" charset="-120"/>
+              </a:rPr>
+              <a:t> · il programma completo</a:t>
+            </a:r>
+            <a:endParaRPr lang="en-US" sz="1100" dirty="0"/>
+          </a:p>
+        </p:txBody>
+      </p:sp>
+      <p:sp>
+        <p:nvSpPr>
           <p:cNvPr id="25" name="Slide Number Placeholder 0"/>
           <p:cNvSpPr>
             <a:spLocks noGrp="1"/>
@@ -14244,6 +16091,158 @@
               <a:t>state: .word TITLE</a:t>
             </a:r>
             <a:endParaRPr lang="en-US" sz="1500" dirty="0"/>
+          </a:p>
+        </p:txBody>
+      </p:sp>
+      <p:sp>
+        <p:nvSpPr>
+          <p:cNvPr id="5" name="Shape 3"/>
+          <p:cNvSpPr/>
+          <p:nvPr/>
+        </p:nvSpPr>
+        <p:spPr>
+          <a:xfrm>
+            <a:off x="7941259" y="91440"/>
+            <a:ext cx="3701796" cy="274320"/>
+          </a:xfrm>
+          <a:prstGeom prst="rect">
+            <a:avLst/>
+          </a:prstGeom>
+          <a:solidFill>
+            <a:srgbClr val="FEF3C7"/>
+          </a:solidFill>
+          <a:ln w="12700">
+            <a:solidFill>
+              <a:srgbClr val="B45309"/>
+            </a:solidFill>
+            <a:prstDash val="solid"/>
+          </a:ln>
+        </p:spPr>
+      </p:sp>
+      <p:sp>
+        <p:nvSpPr>
+          <p:cNvPr id="6" name="Shape 4"/>
+          <p:cNvSpPr/>
+          <p:nvPr/>
+        </p:nvSpPr>
+        <p:spPr>
+          <a:xfrm>
+            <a:off x="7941259" y="91440"/>
+            <a:ext cx="27432" cy="274320"/>
+          </a:xfrm>
+          <a:prstGeom prst="rect">
+            <a:avLst/>
+          </a:prstGeom>
+          <a:solidFill>
+            <a:srgbClr val="B45309"/>
+          </a:solidFill>
+          <a:ln w="12700">
+            <a:solidFill>
+              <a:srgbClr val="B45309"/>
+            </a:solidFill>
+            <a:prstDash val="solid"/>
+          </a:ln>
+        </p:spPr>
+      </p:sp>
+      <p:sp>
+        <p:nvSpPr>
+          <p:cNvPr id="7" name="Shape 5"/>
+          <p:cNvSpPr/>
+          <p:nvPr/>
+        </p:nvSpPr>
+        <p:spPr>
+          <a:xfrm>
+            <a:off x="7996123" y="91440"/>
+            <a:ext cx="27432" cy="274320"/>
+          </a:xfrm>
+          <a:prstGeom prst="rect">
+            <a:avLst/>
+          </a:prstGeom>
+          <a:solidFill>
+            <a:srgbClr val="B45309"/>
+          </a:solidFill>
+          <a:ln w="12700">
+            <a:solidFill>
+              <a:srgbClr val="B45309"/>
+            </a:solidFill>
+            <a:prstDash val="solid"/>
+          </a:ln>
+        </p:spPr>
+      </p:sp>
+      <p:pic>
+        <p:nvPicPr>
+          <p:cNvPr id="8" name="Image 0" descr="preencoded.png">    </p:cNvPr>
+          <p:cNvPicPr>
+            <a:picLocks noChangeAspect="1"/>
+          </p:cNvPicPr>
+          <p:nvPr/>
+        </p:nvPicPr>
+        <p:blipFill>
+          <a:blip r:embed="rId1"/>
+          <a:stretch>
+            <a:fillRect/>
+          </a:stretch>
+        </p:blipFill>
+        <p:spPr>
+          <a:xfrm>
+            <a:off x="8069275" y="128016"/>
+            <a:ext cx="201168" cy="201168"/>
+          </a:xfrm>
+          <a:prstGeom prst="rect">
+            <a:avLst/>
+          </a:prstGeom>
+        </p:spPr>
+      </p:pic>
+      <p:sp>
+        <p:nvSpPr>
+          <p:cNvPr id="9" name="Text 6"/>
+          <p:cNvSpPr txBox="1"/>
+          <p:nvPr/>
+        </p:nvSpPr>
+        <p:spPr>
+          <a:xfrm>
+            <a:off x="8325307" y="91440"/>
+            <a:ext cx="3281172" cy="274320"/>
+          </a:xfrm>
+          <a:prstGeom prst="rect">
+            <a:avLst/>
+          </a:prstGeom>
+          <a:noFill/>
+          <a:ln/>
+        </p:spPr>
+        <p:txBody>
+          <a:bodyPr wrap="square" lIns="0" tIns="0" rIns="0" bIns="0" rtlCol="0" anchor="ctr"/>
+          <a:lstStyle/>
+          <a:p>
+            <a:pPr indent="0" marL="0">
+              <a:buNone/>
+            </a:pPr>
+            <a:r>
+              <a:rPr lang="en-US" sz="1100" b="1" dirty="0">
+                <a:solidFill>
+                  <a:srgbClr val="92400E"/>
+                </a:solidFill>
+                <a:latin typeface="Calibri" pitchFamily="34" charset="0"/>
+                <a:ea typeface="Calibri" pitchFamily="34" charset="-122"/>
+                <a:cs typeface="Calibri" pitchFamily="34" charset="-120"/>
+              </a:rPr>
+              <a:t>DA UTILIZZARE OGGI</a:t>
+            </a:r>
+            <a:pPr indent="0" marL="0">
+              <a:buNone/>
+            </a:pPr>
+            <a:r>
+              <a:rPr lang="en-US" sz="1100" dirty="0">
+                <a:solidFill>
+                  <a:srgbClr val="92400E"/>
+                </a:solidFill>
+                <a:latin typeface="Calibri" pitchFamily="34" charset="0"/>
+                <a:ea typeface="Calibri" pitchFamily="34" charset="-122"/>
+                <a:cs typeface="Calibri" pitchFamily="34" charset="-120"/>
+              </a:rPr>
+              <a:t> · il programma completo</a:t>
+            </a:r>
+            <a:endParaRPr lang="en-US" sz="1100" dirty="0"/>
           </a:p>
         </p:txBody>
       </p:sp>

--- a/it/slides/13-Architettura_dei_Calcolatori-Macchine_Sequenziali-Codice.pptx
+++ b/it/slides/13-Architettura_dei_Calcolatori-Macchine_Sequenziali-Codice.pptx
@@ -121,36 +121,36 @@
   <p:extLst>
     <p:ext uri="{521415D9-36F7-43E2-AB2F-B90AF26B5E84}">
       <p14:sectionLst xmlns:p14="http://schemas.microsoft.com/office/powerpoint/2010/main">
-        <p14:section name="Apertura" id="{725be022-e2de-90b0-745a-98916d1d60f3}">
+        <p14:section name="Apertura" id="{68e2c045-0d69-7ab4-6554-b4e6b1095fd8}">
           <p14:sldIdLst>
             <p14:sldId id="256"/>
             <p14:sldId id="257"/>
           </p14:sldIdLst>
         </p14:section>
-        <p14:section name="Riscaldamento sulla macchina" id="{f230b03e-8623-a333-d697-919fde041449}">
+        <p14:section name="Riscaldamento sulla macchina" id="{feb43c37-6701-fc1b-e072-d1dcfa1f43ed}">
           <p14:sldIdLst>
             <p14:sldId id="258"/>
           </p14:sldIdLst>
         </p14:section>
-        <p14:section name="Macchine a stati finiti" id="{9346c44f-fcf7-46ba-5fc0-d9b9e85fcd35}">
+        <p14:section name="Macchine a stati finiti" id="{a8257223-2229-52a8-75d7-ac321d568749}">
           <p14:sldIdLst>
             <p14:sldId id="259"/>
           </p14:sldIdLst>
         </p14:section>
-        <p14:section name="Ritorno alla macchina" id="{3900a892-dee4-2768-f2cc-caec7e2ce6ce}">
+        <p14:section name="Ritorno alla macchina" id="{9a59f601-c398-a592-a4a5-bac372a76279}">
           <p14:sldIdLst>
             <p14:sldId id="260"/>
             <p14:sldId id="261"/>
           </p14:sldIdLst>
         </p14:section>
-        <p14:section name="Il programma completo" id="{815a2f3e-3ac2-f11b-5ab9-9f176321da65}">
+        <p14:section name="Il programma completo" id="{7359c3e4-d217-216c-adfd-dcab49b79776}">
           <p14:sldIdLst>
             <p14:sldId id="262"/>
             <p14:sldId id="263"/>
             <p14:sldId id="264"/>
           </p14:sldIdLst>
         </p14:section>
-        <p14:section name="Eseguire e provare" id="{b9da3072-e2cf-0192-9063-a93869118593}">
+        <p14:section name="Eseguire e provare" id="{b41c925e-0c91-2f4c-79fc-4c698e6ff0e5}">
           <p14:sldIdLst>
             <p14:sldId id="265"/>
             <p14:sldId id="266"/>
@@ -159,7 +159,7 @@
             <p14:sldId id="269"/>
           </p14:sldIdLst>
         </p14:section>
-        <p14:section name="Esercizi" id="{ba86e318-b263-e280-eda9-d055268241e0}">
+        <p14:section name="Esercizi" id="{ca20664d-2f1f-de24-ffce-6c41dd817725}">
           <p14:sldIdLst>
             <p14:sldId id="270"/>
           </p14:sldIdLst>
